--- a/黒崎/AI研修一覧/Gemini/P-05_実装事例・未来へ/スライド.pptx
+++ b/黒崎/AI研修一覧/Gemini/P-05_実装事例・未来へ/スライド.pptx
@@ -2832,47 +2832,6 @@
           </a:p>
         </p:txBody>
       </p:sp>
-      <p:sp>
-        <p:nvSpPr>
-          <p:cNvPr id="12" name="Text 10"/>
-          <p:cNvSpPr/>
-          <p:nvPr/>
-        </p:nvSpPr>
-        <p:spPr>
-          <a:xfrm>
-            <a:off x="685800" y="4796028"/>
-            <a:ext cx="1828800" cy="274320"/>
-          </a:xfrm>
-          <a:prstGeom prst="rect">
-            <a:avLst/>
-          </a:prstGeom>
-          <a:noFill/>
-          <a:ln/>
-        </p:spPr>
-        <p:txBody>
-          <a:bodyPr wrap="square" rtlCol="0" anchor="ctr">
-            <a:normAutofit/>
-          </a:bodyPr>
-          <a:lstStyle/>
-          <a:p>
-            <a:pPr algn="l" indent="0" marL="0">
-              <a:buNone/>
-            </a:pPr>
-            <a:r>
-              <a:rPr lang="en-US" sz="1000" dirty="0">
-                <a:solidFill>
-                  <a:srgbClr val="9CA3AF"/>
-                </a:solidFill>
-                <a:latin typeface="Calibri" pitchFamily="34" charset="0"/>
-                <a:ea typeface="Calibri" pitchFamily="34" charset="-122"/>
-                <a:cs typeface="Calibri" pitchFamily="34" charset="-120"/>
-              </a:rPr>
-              <a:t>P-05</a:t>
-            </a:r>
-            <a:endParaRPr lang="en-US" sz="1000" dirty="0"/>
-          </a:p>
-        </p:txBody>
-      </p:sp>
     </p:spTree>
   </p:cSld>
   <p:clrMapOvr>
